--- a/ppt/IoTAI09-PCA.pptx
+++ b/ppt/IoTAI09-PCA.pptx
@@ -3691,15 +3691,47 @@
             <a:pPr eaLnBrk="1" hangingPunct="1"/>
             <a:r>
               <a:rPr lang="fr-FR" altLang="fr-FR" dirty="0" err="1"/>
-              <a:t>EMLearn</a:t>
-            </a:r>
-            <a:endParaRPr lang="fr-FR" altLang="fr-FR" dirty="0"/>
+              <a:t>Feature</a:t>
+            </a:r>
+            <a:r>
+              <a:rPr lang="fr-FR" altLang="fr-FR" dirty="0"/>
+              <a:t> Reduction</a:t>
+            </a:r>
+          </a:p>
+        </p:txBody>
+      </p:sp>
+      <p:sp>
+        <p:nvSpPr>
+          <p:cNvPr id="3" name="ZoneTexte 2"/>
+          <p:cNvSpPr txBox="1"/>
+          <p:nvPr/>
+        </p:nvSpPr>
+        <p:spPr>
+          <a:xfrm>
+            <a:off x="3107495" y="2132856"/>
+            <a:ext cx="2929007" cy="646331"/>
+          </a:xfrm>
+          <a:prstGeom prst="rect">
+            <a:avLst/>
+          </a:prstGeom>
+          <a:noFill/>
+        </p:spPr>
+        <p:txBody>
+          <a:bodyPr wrap="none" rtlCol="0">
+            <a:spAutoFit/>
+          </a:bodyPr>
+          <a:lstStyle/>
+          <a:p>
+            <a:r>
+              <a:rPr lang="fr-FR" sz="3600" dirty="0"/>
+              <a:t>Data Science</a:t>
+            </a:r>
           </a:p>
         </p:txBody>
       </p:sp>
       <p:pic>
         <p:nvPicPr>
-          <p:cNvPr id="2" name="Image 1"/>
+          <p:cNvPr id="4" name="Image 3"/>
           <p:cNvPicPr>
             <a:picLocks noChangeAspect="1"/>
           </p:cNvPicPr>
@@ -3713,91 +3745,8 @@
         </p:blipFill>
         <p:spPr>
           <a:xfrm>
-            <a:off x="1214437" y="5023445"/>
-            <a:ext cx="6715125" cy="1285875"/>
-          </a:xfrm>
-          <a:prstGeom prst="rect">
-            <a:avLst/>
-          </a:prstGeom>
-        </p:spPr>
-      </p:pic>
-      <p:sp>
-        <p:nvSpPr>
-          <p:cNvPr id="3" name="ZoneTexte 2"/>
-          <p:cNvSpPr txBox="1"/>
-          <p:nvPr/>
-        </p:nvSpPr>
-        <p:spPr>
-          <a:xfrm>
-            <a:off x="3107495" y="2132856"/>
-            <a:ext cx="2929007" cy="646331"/>
-          </a:xfrm>
-          <a:prstGeom prst="rect">
-            <a:avLst/>
-          </a:prstGeom>
-          <a:noFill/>
-        </p:spPr>
-        <p:txBody>
-          <a:bodyPr wrap="none" rtlCol="0">
-            <a:spAutoFit/>
-          </a:bodyPr>
-          <a:lstStyle/>
-          <a:p>
-            <a:r>
-              <a:rPr lang="fr-FR" sz="3600" dirty="0"/>
-              <a:t>Data Science</a:t>
-            </a:r>
-          </a:p>
-        </p:txBody>
-      </p:sp>
-      <p:pic>
-        <p:nvPicPr>
-          <p:cNvPr id="4" name="Image 3"/>
-          <p:cNvPicPr>
-            <a:picLocks noChangeAspect="1"/>
-          </p:cNvPicPr>
-          <p:nvPr/>
-        </p:nvPicPr>
-        <p:blipFill>
-          <a:blip r:embed="rId3"/>
-          <a:stretch>
-            <a:fillRect/>
-          </a:stretch>
-        </p:blipFill>
-        <p:spPr>
-          <a:xfrm>
             <a:off x="3138560" y="2972129"/>
             <a:ext cx="3067050" cy="762000"/>
-          </a:xfrm>
-          <a:prstGeom prst="rect">
-            <a:avLst/>
-          </a:prstGeom>
-        </p:spPr>
-      </p:pic>
-      <p:pic>
-        <p:nvPicPr>
-          <p:cNvPr id="6" name="Image 5">
-            <a:extLst>
-              <a:ext uri="{FF2B5EF4-FFF2-40B4-BE49-F238E27FC236}">
-                <a16:creationId xmlns:a16="http://schemas.microsoft.com/office/drawing/2014/main" id="{4B0C0DD4-C32D-6361-822A-08686DBB9B90}"/>
-              </a:ext>
-            </a:extLst>
-          </p:cNvPr>
-          <p:cNvPicPr>
-            <a:picLocks noChangeAspect="1"/>
-          </p:cNvPicPr>
-          <p:nvPr/>
-        </p:nvPicPr>
-        <p:blipFill>
-          <a:blip r:embed="rId4"/>
-          <a:stretch>
-            <a:fillRect/>
-          </a:stretch>
-        </p:blipFill>
-        <p:spPr>
-          <a:xfrm>
-            <a:off x="2899339" y="3783217"/>
-            <a:ext cx="3296110" cy="1343212"/>
           </a:xfrm>
           <a:prstGeom prst="rect">
             <a:avLst/>
@@ -3897,6 +3846,26 @@
               <a:rPr lang="fr-FR" dirty="0"/>
               <a:t>Appliquer un TOP 5</a:t>
             </a:r>
+          </a:p>
+          <a:p>
+            <a:pPr lvl="1"/>
+            <a:r>
+              <a:rPr lang="fr-FR" dirty="0"/>
+              <a:t>Eliminer les </a:t>
+            </a:r>
+            <a:r>
+              <a:rPr lang="fr-FR" dirty="0" err="1"/>
+              <a:t>features</a:t>
+            </a:r>
+            <a:r>
+              <a:rPr lang="fr-FR" dirty="0"/>
+              <a:t> non </a:t>
+            </a:r>
+            <a:r>
+              <a:rPr lang="fr-FR"/>
+              <a:t>pertinentes par RF</a:t>
+            </a:r>
+            <a:endParaRPr lang="fr-FR" dirty="0"/>
           </a:p>
           <a:p>
             <a:pPr lvl="1"/>
@@ -5309,12 +5278,8 @@
           <a:p>
             <a:pPr lvl="1"/>
             <a:r>
-              <a:rPr lang="fr-FR" dirty="0" err="1"/>
-              <a:t>Développemnt</a:t>
-            </a:r>
-            <a:r>
-              <a:rPr lang="fr-FR" dirty="0"/>
-              <a:t> propriétaire</a:t>
+              <a:rPr lang="fr-FR" dirty="0"/>
+              <a:t>Développement propriétaire</a:t>
             </a:r>
           </a:p>
           <a:p>
@@ -6111,10 +6076,6 @@
           <a:lstStyle/>
           <a:p>
             <a:r>
-              <a:rPr lang="fr-FR" dirty="0"/>
-              <a:t>Les </a:t>
-            </a:r>
-            <a:r>
               <a:rPr lang="fr-FR" dirty="0" err="1"/>
               <a:t>Random</a:t>
             </a:r>
@@ -6128,7 +6089,7 @@
             </a:r>
             <a:r>
               <a:rPr lang="fr-FR" dirty="0"/>
-              <a:t> sont un extraordinaire outil de corrélation</a:t>
+              <a:t> est un extraordinaire outil de corrélation</a:t>
             </a:r>
           </a:p>
         </p:txBody>
